--- a/ゲーム科2年/00_前期/ゲーム開発Ⅲ/ゲーム物理学/座学/17_摩擦力.pptx
+++ b/ゲーム科2年/00_前期/ゲーム開発Ⅲ/ゲーム物理学/座学/17_摩擦力.pptx
@@ -273,7 +273,7 @@
           <a:p>
             <a:fld id="{E9CC885B-4903-4D54-9A93-00025F12DED9}" type="datetimeFigureOut">
               <a:rPr kumimoji="1" lang="ja-JP" altLang="en-US" smtClean="0"/>
-              <a:t>2025/9/29</a:t>
+              <a:t>2025/10/31</a:t>
             </a:fld>
             <a:endParaRPr kumimoji="1" lang="ja-JP" altLang="en-US"/>
           </a:p>
@@ -503,7 +503,7 @@
           <a:p>
             <a:fld id="{E9CC885B-4903-4D54-9A93-00025F12DED9}" type="datetimeFigureOut">
               <a:rPr kumimoji="1" lang="ja-JP" altLang="en-US" smtClean="0"/>
-              <a:t>2025/9/29</a:t>
+              <a:t>2025/10/31</a:t>
             </a:fld>
             <a:endParaRPr kumimoji="1" lang="ja-JP" altLang="en-US"/>
           </a:p>
@@ -743,7 +743,7 @@
           <a:p>
             <a:fld id="{E9CC885B-4903-4D54-9A93-00025F12DED9}" type="datetimeFigureOut">
               <a:rPr kumimoji="1" lang="ja-JP" altLang="en-US" smtClean="0"/>
-              <a:t>2025/9/29</a:t>
+              <a:t>2025/10/31</a:t>
             </a:fld>
             <a:endParaRPr kumimoji="1" lang="ja-JP" altLang="en-US"/>
           </a:p>
@@ -973,7 +973,7 @@
           <a:p>
             <a:fld id="{E9CC885B-4903-4D54-9A93-00025F12DED9}" type="datetimeFigureOut">
               <a:rPr kumimoji="1" lang="ja-JP" altLang="en-US" smtClean="0"/>
-              <a:t>2025/9/29</a:t>
+              <a:t>2025/10/31</a:t>
             </a:fld>
             <a:endParaRPr kumimoji="1" lang="ja-JP" altLang="en-US"/>
           </a:p>
@@ -1248,7 +1248,7 @@
           <a:p>
             <a:fld id="{E9CC885B-4903-4D54-9A93-00025F12DED9}" type="datetimeFigureOut">
               <a:rPr kumimoji="1" lang="ja-JP" altLang="en-US" smtClean="0"/>
-              <a:t>2025/9/29</a:t>
+              <a:t>2025/10/31</a:t>
             </a:fld>
             <a:endParaRPr kumimoji="1" lang="ja-JP" altLang="en-US"/>
           </a:p>
@@ -1577,7 +1577,7 @@
           <a:p>
             <a:fld id="{E9CC885B-4903-4D54-9A93-00025F12DED9}" type="datetimeFigureOut">
               <a:rPr kumimoji="1" lang="ja-JP" altLang="en-US" smtClean="0"/>
-              <a:t>2025/9/29</a:t>
+              <a:t>2025/10/31</a:t>
             </a:fld>
             <a:endParaRPr kumimoji="1" lang="ja-JP" altLang="en-US"/>
           </a:p>
@@ -2053,7 +2053,7 @@
           <a:p>
             <a:fld id="{E9CC885B-4903-4D54-9A93-00025F12DED9}" type="datetimeFigureOut">
               <a:rPr kumimoji="1" lang="ja-JP" altLang="en-US" smtClean="0"/>
-              <a:t>2025/9/29</a:t>
+              <a:t>2025/10/31</a:t>
             </a:fld>
             <a:endParaRPr kumimoji="1" lang="ja-JP" altLang="en-US"/>
           </a:p>
@@ -2194,7 +2194,7 @@
           <a:p>
             <a:fld id="{E9CC885B-4903-4D54-9A93-00025F12DED9}" type="datetimeFigureOut">
               <a:rPr kumimoji="1" lang="ja-JP" altLang="en-US" smtClean="0"/>
-              <a:t>2025/9/29</a:t>
+              <a:t>2025/10/31</a:t>
             </a:fld>
             <a:endParaRPr kumimoji="1" lang="ja-JP" altLang="en-US"/>
           </a:p>
@@ -2307,7 +2307,7 @@
           <a:p>
             <a:fld id="{E9CC885B-4903-4D54-9A93-00025F12DED9}" type="datetimeFigureOut">
               <a:rPr kumimoji="1" lang="ja-JP" altLang="en-US" smtClean="0"/>
-              <a:t>2025/9/29</a:t>
+              <a:t>2025/10/31</a:t>
             </a:fld>
             <a:endParaRPr kumimoji="1" lang="ja-JP" altLang="en-US"/>
           </a:p>
@@ -2650,7 +2650,7 @@
           <a:p>
             <a:fld id="{E9CC885B-4903-4D54-9A93-00025F12DED9}" type="datetimeFigureOut">
               <a:rPr kumimoji="1" lang="ja-JP" altLang="en-US" smtClean="0"/>
-              <a:t>2025/9/29</a:t>
+              <a:t>2025/10/31</a:t>
             </a:fld>
             <a:endParaRPr kumimoji="1" lang="ja-JP" altLang="en-US"/>
           </a:p>
@@ -2938,7 +2938,7 @@
           <a:p>
             <a:fld id="{E9CC885B-4903-4D54-9A93-00025F12DED9}" type="datetimeFigureOut">
               <a:rPr kumimoji="1" lang="ja-JP" altLang="en-US" smtClean="0"/>
-              <a:t>2025/9/29</a:t>
+              <a:t>2025/10/31</a:t>
             </a:fld>
             <a:endParaRPr kumimoji="1" lang="ja-JP" altLang="en-US"/>
           </a:p>
@@ -3211,7 +3211,7 @@
           <a:p>
             <a:fld id="{E9CC885B-4903-4D54-9A93-00025F12DED9}" type="datetimeFigureOut">
               <a:rPr kumimoji="1" lang="ja-JP" altLang="en-US" smtClean="0"/>
-              <a:t>2025/9/29</a:t>
+              <a:t>2025/10/31</a:t>
             </a:fld>
             <a:endParaRPr kumimoji="1" lang="ja-JP" altLang="en-US"/>
           </a:p>
@@ -6242,6 +6242,12 @@
                               </a:rPr>
                               <m:t>𝑚</m:t>
                             </m:r>
+                            <m:r>
+                              <a:rPr lang="en-US" altLang="ja-JP" sz="2400" i="1">
+                                <a:latin typeface="Cambria Math" panose="02040503050406030204" pitchFamily="18" charset="0"/>
+                              </a:rPr>
+                              <m:t>/</m:t>
+                            </m:r>
                             <m:sSup>
                               <m:sSupPr>
                                 <m:ctrlPr>
@@ -7141,7 +7147,7 @@
             <p:spPr>
               <a:xfrm>
                 <a:off x="567542" y="1216429"/>
-                <a:ext cx="9257663" cy="3785652"/>
+                <a:ext cx="9761005" cy="3785652"/>
               </a:xfrm>
               <a:prstGeom prst="rect">
                 <a:avLst/>
@@ -7163,7 +7169,15 @@
               <a:p>
                 <a:r>
                   <a:rPr lang="ja-JP" altLang="en-US" sz="2400" dirty="0"/>
-                  <a:t>ゴムで出来た置物をコンクリートブロックの上に置きました。</a:t>
+                  <a:t>ゴムで出来た</a:t>
+                </a:r>
+                <a:r>
+                  <a:rPr lang="en-US" altLang="ja-JP" sz="2400" dirty="0"/>
+                  <a:t>1kg</a:t>
+                </a:r>
+                <a:r>
+                  <a:rPr lang="ja-JP" altLang="en-US" sz="2400" dirty="0"/>
+                  <a:t>の置物をコンクリートブロックの上に置きました。</a:t>
                 </a:r>
                 <a:endParaRPr lang="en-US" altLang="ja-JP" sz="2400" dirty="0"/>
               </a:p>
@@ -7238,7 +7252,19 @@
               <a:p>
                 <a:r>
                   <a:rPr lang="ja-JP" altLang="en-US" sz="2400" b="0" dirty="0"/>
-                  <a:t>金属の板の上に氷を置いて、板を</a:t>
+                  <a:t>金属の板の上に</a:t>
+                </a:r>
+                <a:r>
+                  <a:rPr lang="en-US" altLang="ja-JP" sz="2400"/>
+                  <a:t>2kg</a:t>
+                </a:r>
+                <a:r>
+                  <a:rPr lang="ja-JP" altLang="en-US" sz="2400" dirty="0"/>
+                  <a:t>の</a:t>
+                </a:r>
+                <a:r>
+                  <a:rPr lang="ja-JP" altLang="en-US" sz="2400" b="0" dirty="0"/>
+                  <a:t>氷を置いて、板を</a:t>
                 </a:r>
                 <a14:m>
                   <m:oMath xmlns:m="http://schemas.openxmlformats.org/officeDocument/2006/math">
@@ -7315,7 +7341,7 @@
             <p:spPr>
               <a:xfrm>
                 <a:off x="567542" y="1216429"/>
-                <a:ext cx="9257663" cy="3785652"/>
+                <a:ext cx="9761005" cy="3785652"/>
               </a:xfrm>
               <a:prstGeom prst="rect">
                 <a:avLst/>
@@ -7323,7 +7349,7 @@
               <a:blipFill>
                 <a:blip r:embed="rId2"/>
                 <a:stretch>
-                  <a:fillRect l="-987" t="-1288" r="-66" b="-2738"/>
+                  <a:fillRect l="-937" t="-1288" b="-2738"/>
                 </a:stretch>
               </a:blipFill>
             </p:spPr>
